--- a/Lecture Slides/VideoLectureSlides/7.3.pptx
+++ b/Lecture Slides/VideoLectureSlides/7.3.pptx
@@ -16,8 +16,8 @@
     <p:sldId id="266" r:id="rId10"/>
     <p:sldId id="376" r:id="rId11"/>
     <p:sldId id="287" r:id="rId12"/>
-    <p:sldId id="267" r:id="rId13"/>
-    <p:sldId id="375" r:id="rId14"/>
+    <p:sldId id="377" r:id="rId13"/>
+    <p:sldId id="267" r:id="rId14"/>
   </p:sldIdLst>
   <p:sldSz cx="9144000" cy="6858000" type="screen4x3"/>
   <p:notesSz cx="6858000" cy="9144000"/>
@@ -1059,7 +1059,7 @@
           <a:p>
             <a:fld id="{1AA1AB63-216F-4D5B-8811-CCB935E98D4A}" type="datetimeFigureOut">
               <a:rPr lang="en-US" smtClean="0"/>
-              <a:t>12/1/2023</a:t>
+              <a:t>1/13/2026</a:t>
             </a:fld>
             <a:endParaRPr lang="en-US"/>
           </a:p>
@@ -4597,7 +4597,7 @@
           <a:p>
             <a:r>
               <a:rPr lang="en-US" dirty="0"/>
-              <a:t>Wedges Practice Problem</a:t>
+              <a:t>Wedges Worked Example</a:t>
             </a:r>
           </a:p>
         </p:txBody>
@@ -4612,124 +4612,35 @@
             <p:ph idx="1"/>
           </p:nvPr>
         </p:nvSpPr>
-        <p:spPr/>
+        <p:spPr>
+          <a:xfrm>
+            <a:off x="457200" y="1537374"/>
+            <a:ext cx="3886200" cy="4850051"/>
+          </a:xfrm>
+        </p:spPr>
         <p:txBody>
-          <a:bodyPr/>
+          <a:bodyPr>
+            <a:normAutofit fontScale="77500" lnSpcReduction="20000"/>
+          </a:bodyPr>
           <a:lstStyle/>
           <a:p>
             <a:r>
               <a:rPr lang="en-US" dirty="0"/>
-              <a:t>A wedge as shown below is being used to lift the corner of the foundation of a house. How large must the pushing force be to exert a one ton (2000 lb) lifting force?</a:t>
+              <a:t>A heavy safe is being pushed away from a wall with a wedge as shown to the right. Assume the wedge has an angle of 5 degrees, the coefficient of friction between the wedge and the safe is 0.16, and the coefficients of friction  everywhere else is 0.35. What is the pushing force required to move the safe out from the wall?</a:t>
             </a:r>
-          </a:p>
-        </p:txBody>
-      </p:sp>
-      <p:sp>
-        <p:nvSpPr>
-          <p:cNvPr id="5" name="Isosceles Triangle 4"/>
-          <p:cNvSpPr/>
-          <p:nvPr/>
-        </p:nvSpPr>
-        <p:spPr>
-          <a:xfrm rot="10800000">
-            <a:off x="3733800" y="5791200"/>
-            <a:ext cx="2286000" cy="457200"/>
-          </a:xfrm>
-          <a:prstGeom prst="triangle">
-            <a:avLst>
-              <a:gd name="adj" fmla="val 0"/>
-            </a:avLst>
-          </a:prstGeom>
-        </p:spPr>
-        <p:style>
-          <a:lnRef idx="1">
-            <a:schemeClr val="dk1"/>
-          </a:lnRef>
-          <a:fillRef idx="2">
-            <a:schemeClr val="dk1"/>
-          </a:fillRef>
-          <a:effectRef idx="1">
-            <a:schemeClr val="dk1"/>
-          </a:effectRef>
-          <a:fontRef idx="minor">
-            <a:schemeClr val="dk1"/>
-          </a:fontRef>
-        </p:style>
-        <p:txBody>
-          <a:bodyPr rtlCol="0" anchor="ctr"/>
-          <a:lstStyle/>
-          <a:p>
-            <a:pPr algn="ctr"/>
-            <a:endParaRPr lang="en-US"/>
-          </a:p>
-        </p:txBody>
-      </p:sp>
-      <p:sp>
-        <p:nvSpPr>
-          <p:cNvPr id="6" name="Isosceles Triangle 5"/>
-          <p:cNvSpPr/>
-          <p:nvPr/>
-        </p:nvSpPr>
-        <p:spPr>
-          <a:xfrm>
-            <a:off x="3733800" y="5791200"/>
-            <a:ext cx="2286000" cy="457200"/>
-          </a:xfrm>
-          <a:prstGeom prst="triangle">
-            <a:avLst>
-              <a:gd name="adj" fmla="val 0"/>
-            </a:avLst>
-          </a:prstGeom>
-          <a:solidFill>
-            <a:schemeClr val="bg2">
-              <a:lumMod val="50000"/>
-            </a:schemeClr>
-          </a:solidFill>
-          <a:ln>
-            <a:solidFill>
-              <a:schemeClr val="bg2">
-                <a:lumMod val="25000"/>
-              </a:schemeClr>
-            </a:solidFill>
-          </a:ln>
-        </p:spPr>
-        <p:style>
-          <a:lnRef idx="2">
-            <a:schemeClr val="accent6">
-              <a:shade val="50000"/>
-            </a:schemeClr>
-          </a:lnRef>
-          <a:fillRef idx="1">
-            <a:schemeClr val="accent6"/>
-          </a:fillRef>
-          <a:effectRef idx="0">
-            <a:schemeClr val="accent6"/>
-          </a:effectRef>
-          <a:fontRef idx="minor">
-            <a:schemeClr val="lt1"/>
-          </a:fontRef>
-        </p:style>
-        <p:txBody>
-          <a:bodyPr rtlCol="0" anchor="ctr"/>
-          <a:lstStyle/>
-          <a:p>
-            <a:pPr algn="ctr"/>
-            <a:endParaRPr lang="en-US"/>
           </a:p>
         </p:txBody>
       </p:sp>
       <p:cxnSp>
         <p:nvCxnSpPr>
-          <p:cNvPr id="7" name="Straight Arrow Connector 6"/>
-          <p:cNvCxnSpPr>
-            <a:endCxn id="5" idx="1"/>
-          </p:cNvCxnSpPr>
+          <p:cNvPr id="5" name="Straight Arrow Connector 4"/>
+          <p:cNvCxnSpPr/>
           <p:nvPr/>
         </p:nvCxnSpPr>
         <p:spPr>
-          <a:xfrm flipH="1">
-            <a:off x="6019800" y="6019800"/>
-            <a:ext cx="923603" cy="0"/>
+          <a:xfrm>
+            <a:off x="5386740" y="2220759"/>
+            <a:ext cx="0" cy="903441"/>
           </a:xfrm>
           <a:prstGeom prst="straightConnector1">
             <a:avLst/>
@@ -4761,13 +4672,13 @@
         <mc:Choice Requires="a14">
           <p:sp>
             <p:nvSpPr>
-              <p:cNvPr id="8" name="Rectangle 7"/>
+              <p:cNvPr id="11" name="Rectangle 10"/>
               <p:cNvSpPr/>
               <p:nvPr/>
             </p:nvSpPr>
             <p:spPr>
               <a:xfrm>
-                <a:off x="7239000" y="5697348"/>
+                <a:off x="4996537" y="1826740"/>
                 <a:ext cx="780406" cy="394019"/>
               </a:xfrm>
               <a:prstGeom prst="rect">
@@ -4838,7 +4749,7 @@
         <mc:Fallback xmlns="">
           <p:sp>
             <p:nvSpPr>
-              <p:cNvPr id="8" name="Rectangle 7"/>
+              <p:cNvPr id="11" name="Rectangle 10"/>
               <p:cNvSpPr>
                 <a:spLocks noRot="1" noChangeAspect="1" noMove="1" noResize="1" noEditPoints="1" noAdjustHandles="1" noChangeArrowheads="1" noChangeShapeType="1" noTextEdit="1"/>
               </p:cNvSpPr>
@@ -4846,7 +4757,7 @@
             </p:nvSpPr>
             <p:spPr>
               <a:xfrm>
-                <a:off x="7239000" y="5697348"/>
+                <a:off x="4996537" y="1826740"/>
                 <a:ext cx="780406" cy="394019"/>
               </a:xfrm>
               <a:prstGeom prst="rect">
@@ -4876,94 +4787,20 @@
       </mc:AlternateContent>
       <p:sp>
         <p:nvSpPr>
-          <p:cNvPr id="12" name="Rectangle 11"/>
+          <p:cNvPr id="14" name="L-Shape 13"/>
           <p:cNvSpPr/>
           <p:nvPr/>
         </p:nvSpPr>
         <p:spPr>
           <a:xfrm>
-            <a:off x="4190999" y="4343400"/>
-            <a:ext cx="1371600" cy="1447800"/>
+            <a:off x="4876800" y="3334396"/>
+            <a:ext cx="3733800" cy="3218804"/>
           </a:xfrm>
-          <a:prstGeom prst="rect">
-            <a:avLst/>
-          </a:prstGeom>
-        </p:spPr>
-        <p:style>
-          <a:lnRef idx="2">
-            <a:schemeClr val="accent6">
-              <a:shade val="50000"/>
-            </a:schemeClr>
-          </a:lnRef>
-          <a:fillRef idx="1">
-            <a:schemeClr val="accent6"/>
-          </a:fillRef>
-          <a:effectRef idx="0">
-            <a:schemeClr val="accent6"/>
-          </a:effectRef>
-          <a:fontRef idx="minor">
-            <a:schemeClr val="lt1"/>
-          </a:fontRef>
-        </p:style>
-        <p:txBody>
-          <a:bodyPr rtlCol="0" anchor="ctr"/>
-          <a:lstStyle/>
-          <a:p>
-            <a:pPr algn="ctr"/>
-            <a:endParaRPr lang="en-US"/>
-          </a:p>
-        </p:txBody>
-      </p:sp>
-      <p:cxnSp>
-        <p:nvCxnSpPr>
-          <p:cNvPr id="11" name="Straight Arrow Connector 10"/>
-          <p:cNvCxnSpPr/>
-          <p:nvPr/>
-        </p:nvCxnSpPr>
-        <p:spPr>
-          <a:xfrm flipH="1" flipV="1">
-            <a:off x="4876798" y="4038600"/>
-            <a:ext cx="2" cy="1752600"/>
-          </a:xfrm>
-          <a:prstGeom prst="straightConnector1">
-            <a:avLst/>
-          </a:prstGeom>
-          <a:ln>
-            <a:solidFill>
-              <a:srgbClr val="FF0000"/>
-            </a:solidFill>
-            <a:prstDash val="solid"/>
-            <a:tailEnd type="arrow"/>
-          </a:ln>
-        </p:spPr>
-        <p:style>
-          <a:lnRef idx="2">
-            <a:schemeClr val="accent2"/>
-          </a:lnRef>
-          <a:fillRef idx="0">
-            <a:schemeClr val="accent2"/>
-          </a:fillRef>
-          <a:effectRef idx="1">
-            <a:schemeClr val="accent2"/>
-          </a:effectRef>
-          <a:fontRef idx="minor">
-            <a:schemeClr val="tx1"/>
-          </a:fontRef>
-        </p:style>
-      </p:cxnSp>
-      <p:sp>
-        <p:nvSpPr>
-          <p:cNvPr id="14" name="Rectangle 13"/>
-          <p:cNvSpPr/>
-          <p:nvPr/>
-        </p:nvSpPr>
-        <p:spPr>
-          <a:xfrm>
-            <a:off x="0" y="6248401"/>
-            <a:ext cx="9144000" cy="609599"/>
-          </a:xfrm>
-          <a:prstGeom prst="rect">
-            <a:avLst/>
+          <a:prstGeom prst="corner">
+            <a:avLst>
+              <a:gd name="adj1" fmla="val 8402"/>
+              <a:gd name="adj2" fmla="val 9755"/>
+            </a:avLst>
           </a:prstGeom>
           <a:solidFill>
             <a:schemeClr val="bg2">
@@ -4980,15 +4817,15 @@
         </p:spPr>
         <p:style>
           <a:lnRef idx="2">
-            <a:schemeClr val="accent6">
+            <a:schemeClr val="accent3">
               <a:shade val="50000"/>
             </a:schemeClr>
           </a:lnRef>
           <a:fillRef idx="1">
-            <a:schemeClr val="accent6"/>
+            <a:schemeClr val="accent3"/>
           </a:fillRef>
           <a:effectRef idx="0">
-            <a:schemeClr val="accent6"/>
+            <a:schemeClr val="accent3"/>
           </a:effectRef>
           <a:fontRef idx="minor">
             <a:schemeClr val="lt1"/>
@@ -5003,538 +4840,145 @@
           </a:p>
         </p:txBody>
       </p:sp>
-      <mc:AlternateContent xmlns:mc="http://schemas.openxmlformats.org/markup-compatibility/2006" xmlns:a14="http://schemas.microsoft.com/office/drawing/2010/main">
-        <mc:Choice Requires="a14">
-          <p:sp>
-            <p:nvSpPr>
-              <p:cNvPr id="15" name="Rectangle 14"/>
-              <p:cNvSpPr/>
-              <p:nvPr/>
-            </p:nvSpPr>
-            <p:spPr>
-              <a:xfrm>
-                <a:off x="4318824" y="3637815"/>
-                <a:ext cx="1115947" cy="369332"/>
-              </a:xfrm>
-              <a:prstGeom prst="rect">
-                <a:avLst/>
-              </a:prstGeom>
-            </p:spPr>
-            <p:txBody>
-              <a:bodyPr wrap="none">
-                <a:spAutoFit/>
-              </a:bodyPr>
-              <a:lstStyle/>
-              <a:p>
-                <a:pPr/>
-                <a14:m>
-                  <m:oMathPara xmlns:m="http://schemas.openxmlformats.org/officeDocument/2006/math">
-                    <m:oMathParaPr>
-                      <m:jc m:val="centerGroup"/>
-                    </m:oMathParaPr>
-                    <m:oMath xmlns:m="http://schemas.openxmlformats.org/officeDocument/2006/math">
-                      <m:r>
-                        <a:rPr lang="en-US" i="1" smtClean="0">
-                          <a:solidFill>
-                            <a:srgbClr val="FF0000"/>
-                          </a:solidFill>
-                          <a:latin typeface="Cambria Math"/>
-                        </a:rPr>
-                        <m:t>2</m:t>
-                      </m:r>
-                      <m:r>
-                        <a:rPr lang="en-US" b="0" i="1" smtClean="0">
-                          <a:solidFill>
-                            <a:srgbClr val="FF0000"/>
-                          </a:solidFill>
-                          <a:latin typeface="Cambria Math"/>
-                        </a:rPr>
-                        <m:t>000 </m:t>
-                      </m:r>
-                      <m:r>
-                        <a:rPr lang="en-US" b="0" i="1" smtClean="0">
-                          <a:solidFill>
-                            <a:srgbClr val="FF0000"/>
-                          </a:solidFill>
-                          <a:latin typeface="Cambria Math"/>
-                        </a:rPr>
-                        <m:t>𝑙𝑏𝑠</m:t>
-                      </m:r>
-                    </m:oMath>
-                  </m:oMathPara>
-                </a14:m>
-                <a:endParaRPr lang="en-US" dirty="0"/>
-              </a:p>
-            </p:txBody>
-          </p:sp>
-        </mc:Choice>
-        <mc:Fallback xmlns="">
-          <p:sp>
-            <p:nvSpPr>
-              <p:cNvPr id="15" name="Rectangle 14"/>
-              <p:cNvSpPr>
-                <a:spLocks noRot="1" noChangeAspect="1" noMove="1" noResize="1" noEditPoints="1" noAdjustHandles="1" noChangeArrowheads="1" noChangeShapeType="1" noTextEdit="1"/>
-              </p:cNvSpPr>
-              <p:nvPr/>
-            </p:nvSpPr>
-            <p:spPr>
-              <a:xfrm>
-                <a:off x="4318824" y="3637815"/>
-                <a:ext cx="1115947" cy="369332"/>
-              </a:xfrm>
-              <a:prstGeom prst="rect">
-                <a:avLst/>
-              </a:prstGeom>
-              <a:blipFill rotWithShape="1">
-                <a:blip r:embed="rId3"/>
-                <a:stretch>
-                  <a:fillRect/>
-                </a:stretch>
-              </a:blipFill>
-            </p:spPr>
-            <p:txBody>
-              <a:bodyPr/>
-              <a:lstStyle/>
-              <a:p>
-                <a:r>
-                  <a:rPr lang="en-US">
-                    <a:noFill/>
-                  </a:rPr>
-                  <a:t> </a:t>
-                </a:r>
-              </a:p>
-            </p:txBody>
-          </p:sp>
-        </mc:Fallback>
-      </mc:AlternateContent>
-      <mc:AlternateContent xmlns:mc="http://schemas.openxmlformats.org/markup-compatibility/2006" xmlns:a14="http://schemas.microsoft.com/office/drawing/2010/main">
-        <mc:Choice Requires="a14">
-          <p:sp>
-            <p:nvSpPr>
-              <p:cNvPr id="17" name="Rectangle 16"/>
-              <p:cNvSpPr/>
-              <p:nvPr/>
-            </p:nvSpPr>
-            <p:spPr>
-              <a:xfrm>
-                <a:off x="5948474" y="4038600"/>
-                <a:ext cx="1066254" cy="369332"/>
-              </a:xfrm>
-              <a:prstGeom prst="rect">
-                <a:avLst/>
-              </a:prstGeom>
-            </p:spPr>
-            <p:txBody>
-              <a:bodyPr wrap="none">
-                <a:spAutoFit/>
-              </a:bodyPr>
-              <a:lstStyle/>
-              <a:p>
-                <a:pPr/>
-                <a14:m>
-                  <m:oMathPara xmlns:m="http://schemas.openxmlformats.org/officeDocument/2006/math">
-                    <m:oMathParaPr>
-                      <m:jc m:val="centerGroup"/>
-                    </m:oMathParaPr>
-                    <m:oMath xmlns:m="http://schemas.openxmlformats.org/officeDocument/2006/math">
-                      <m:sSub>
-                        <m:sSubPr>
-                          <m:ctrlPr>
-                            <a:rPr lang="en-US" i="1" smtClean="0">
-                              <a:solidFill>
-                                <a:schemeClr val="tx1"/>
-                              </a:solidFill>
-                              <a:latin typeface="Cambria Math" panose="02040503050406030204" pitchFamily="18" charset="0"/>
-                            </a:rPr>
-                          </m:ctrlPr>
-                        </m:sSubPr>
-                        <m:e>
-                          <m:r>
-                            <m:rPr>
-                              <m:sty m:val="p"/>
-                            </m:rPr>
-                            <a:rPr lang="en-US">
-                              <a:solidFill>
-                                <a:schemeClr val="tx1"/>
-                              </a:solidFill>
-                              <a:latin typeface="Cambria Math"/>
-                              <a:ea typeface="Cambria Math"/>
-                            </a:rPr>
-                            <m:t>μ</m:t>
-                          </m:r>
-                        </m:e>
-                        <m:sub>
-                          <m:r>
-                            <m:rPr>
-                              <m:sty m:val="p"/>
-                            </m:rPr>
-                            <a:rPr lang="en-US">
-                              <a:solidFill>
-                                <a:schemeClr val="tx1"/>
-                              </a:solidFill>
-                              <a:latin typeface="Cambria Math"/>
-                            </a:rPr>
-                            <m:t>s</m:t>
-                          </m:r>
-                        </m:sub>
-                      </m:sSub>
-                      <m:r>
-                        <a:rPr lang="en-US" b="0" i="1" smtClean="0">
-                          <a:solidFill>
-                            <a:schemeClr val="tx1"/>
-                          </a:solidFill>
-                          <a:latin typeface="Cambria Math"/>
-                        </a:rPr>
-                        <m:t>=.15</m:t>
-                      </m:r>
-                    </m:oMath>
-                  </m:oMathPara>
-                </a14:m>
-                <a:endParaRPr lang="en-US" sz="1100" dirty="0"/>
-              </a:p>
-            </p:txBody>
-          </p:sp>
-        </mc:Choice>
-        <mc:Fallback xmlns="">
-          <p:sp>
-            <p:nvSpPr>
-              <p:cNvPr id="17" name="Rectangle 16"/>
-              <p:cNvSpPr>
-                <a:spLocks noRot="1" noChangeAspect="1" noMove="1" noResize="1" noEditPoints="1" noAdjustHandles="1" noChangeArrowheads="1" noChangeShapeType="1" noTextEdit="1"/>
-              </p:cNvSpPr>
-              <p:nvPr/>
-            </p:nvSpPr>
-            <p:spPr>
-              <a:xfrm>
-                <a:off x="5948474" y="4038600"/>
-                <a:ext cx="1066254" cy="369332"/>
-              </a:xfrm>
-              <a:prstGeom prst="rect">
-                <a:avLst/>
-              </a:prstGeom>
-              <a:blipFill rotWithShape="1">
-                <a:blip r:embed="rId4"/>
-                <a:stretch>
-                  <a:fillRect b="-5000"/>
-                </a:stretch>
-              </a:blipFill>
-            </p:spPr>
-            <p:txBody>
-              <a:bodyPr/>
-              <a:lstStyle/>
-              <a:p>
-                <a:r>
-                  <a:rPr lang="en-US">
-                    <a:noFill/>
-                  </a:rPr>
-                  <a:t> </a:t>
-                </a:r>
-              </a:p>
-            </p:txBody>
-          </p:sp>
-        </mc:Fallback>
-      </mc:AlternateContent>
-      <mc:AlternateContent xmlns:mc="http://schemas.openxmlformats.org/markup-compatibility/2006" xmlns:a14="http://schemas.microsoft.com/office/drawing/2010/main">
-        <mc:Choice Requires="a14">
-          <p:sp>
-            <p:nvSpPr>
-              <p:cNvPr id="18" name="Rectangle 17"/>
-              <p:cNvSpPr/>
-              <p:nvPr/>
-            </p:nvSpPr>
-            <p:spPr>
-              <a:xfrm>
-                <a:off x="6410276" y="4914900"/>
-                <a:ext cx="1066254" cy="369332"/>
-              </a:xfrm>
-              <a:prstGeom prst="rect">
-                <a:avLst/>
-              </a:prstGeom>
-            </p:spPr>
-            <p:txBody>
-              <a:bodyPr wrap="none">
-                <a:spAutoFit/>
-              </a:bodyPr>
-              <a:lstStyle/>
-              <a:p>
-                <a:pPr/>
-                <a14:m>
-                  <m:oMathPara xmlns:m="http://schemas.openxmlformats.org/officeDocument/2006/math">
-                    <m:oMathParaPr>
-                      <m:jc m:val="centerGroup"/>
-                    </m:oMathParaPr>
-                    <m:oMath xmlns:m="http://schemas.openxmlformats.org/officeDocument/2006/math">
-                      <m:sSub>
-                        <m:sSubPr>
-                          <m:ctrlPr>
-                            <a:rPr lang="en-US" i="1" smtClean="0">
-                              <a:solidFill>
-                                <a:schemeClr val="tx1"/>
-                              </a:solidFill>
-                              <a:latin typeface="Cambria Math" panose="02040503050406030204" pitchFamily="18" charset="0"/>
-                            </a:rPr>
-                          </m:ctrlPr>
-                        </m:sSubPr>
-                        <m:e>
-                          <m:r>
-                            <m:rPr>
-                              <m:sty m:val="p"/>
-                            </m:rPr>
-                            <a:rPr lang="en-US">
-                              <a:solidFill>
-                                <a:schemeClr val="tx1"/>
-                              </a:solidFill>
-                              <a:latin typeface="Cambria Math"/>
-                              <a:ea typeface="Cambria Math"/>
-                            </a:rPr>
-                            <m:t>μ</m:t>
-                          </m:r>
-                        </m:e>
-                        <m:sub>
-                          <m:r>
-                            <m:rPr>
-                              <m:sty m:val="p"/>
-                            </m:rPr>
-                            <a:rPr lang="en-US">
-                              <a:solidFill>
-                                <a:schemeClr val="tx1"/>
-                              </a:solidFill>
-                              <a:latin typeface="Cambria Math"/>
-                            </a:rPr>
-                            <m:t>s</m:t>
-                          </m:r>
-                        </m:sub>
-                      </m:sSub>
-                      <m:r>
-                        <a:rPr lang="en-US" b="0" i="1" smtClean="0">
-                          <a:solidFill>
-                            <a:schemeClr val="tx1"/>
-                          </a:solidFill>
-                          <a:latin typeface="Cambria Math"/>
-                        </a:rPr>
-                        <m:t>=.05</m:t>
-                      </m:r>
-                    </m:oMath>
-                  </m:oMathPara>
-                </a14:m>
-                <a:endParaRPr lang="en-US" sz="1100" dirty="0"/>
-              </a:p>
-            </p:txBody>
-          </p:sp>
-        </mc:Choice>
-        <mc:Fallback xmlns="">
-          <p:sp>
-            <p:nvSpPr>
-              <p:cNvPr id="18" name="Rectangle 17"/>
-              <p:cNvSpPr>
-                <a:spLocks noRot="1" noChangeAspect="1" noMove="1" noResize="1" noEditPoints="1" noAdjustHandles="1" noChangeArrowheads="1" noChangeShapeType="1" noTextEdit="1"/>
-              </p:cNvSpPr>
-              <p:nvPr/>
-            </p:nvSpPr>
-            <p:spPr>
-              <a:xfrm>
-                <a:off x="6410276" y="4914900"/>
-                <a:ext cx="1066254" cy="369332"/>
-              </a:xfrm>
-              <a:prstGeom prst="rect">
-                <a:avLst/>
-              </a:prstGeom>
-              <a:blipFill rotWithShape="1">
-                <a:blip r:embed="rId5"/>
-                <a:stretch>
-                  <a:fillRect b="-4918"/>
-                </a:stretch>
-              </a:blipFill>
-            </p:spPr>
-            <p:txBody>
-              <a:bodyPr/>
-              <a:lstStyle/>
-              <a:p>
-                <a:r>
-                  <a:rPr lang="en-US">
-                    <a:noFill/>
-                  </a:rPr>
-                  <a:t> </a:t>
-                </a:r>
-              </a:p>
-            </p:txBody>
-          </p:sp>
-        </mc:Fallback>
-      </mc:AlternateContent>
-      <p:cxnSp>
-        <p:nvCxnSpPr>
-          <p:cNvPr id="20" name="Straight Arrow Connector 19"/>
-          <p:cNvCxnSpPr>
-            <a:stCxn id="17" idx="2"/>
-          </p:cNvCxnSpPr>
+      <p:sp>
+        <p:nvSpPr>
+          <p:cNvPr id="4" name="Rectangle 3"/>
+          <p:cNvSpPr/>
           <p:nvPr/>
-        </p:nvCxnSpPr>
+        </p:nvSpPr>
         <p:spPr>
-          <a:xfrm flipH="1">
-            <a:off x="5105400" y="4407932"/>
-            <a:ext cx="1376201" cy="1383268"/>
+          <a:xfrm>
+            <a:off x="5307520" y="4821278"/>
+            <a:ext cx="1550480" cy="1444307"/>
           </a:xfrm>
-          <a:prstGeom prst="straightConnector1">
+          <a:prstGeom prst="rect">
             <a:avLst/>
           </a:prstGeom>
-          <a:ln>
-            <a:tailEnd type="arrow"/>
-          </a:ln>
         </p:spPr>
         <p:style>
           <a:lnRef idx="1">
             <a:schemeClr val="dk1"/>
           </a:lnRef>
-          <a:fillRef idx="0">
+          <a:fillRef idx="2">
             <a:schemeClr val="dk1"/>
           </a:fillRef>
-          <a:effectRef idx="0">
+          <a:effectRef idx="1">
             <a:schemeClr val="dk1"/>
           </a:effectRef>
           <a:fontRef idx="minor">
-            <a:schemeClr val="tx1"/>
+            <a:schemeClr val="dk1"/>
           </a:fontRef>
         </p:style>
-      </p:cxnSp>
-      <p:cxnSp>
-        <p:nvCxnSpPr>
-          <p:cNvPr id="21" name="Straight Arrow Connector 20"/>
-          <p:cNvCxnSpPr>
-            <a:stCxn id="18" idx="2"/>
-          </p:cNvCxnSpPr>
+        <p:txBody>
+          <a:bodyPr rtlCol="0" anchor="ctr"/>
+          <a:lstStyle/>
+          <a:p>
+            <a:pPr algn="ctr"/>
+            <a:endParaRPr lang="en-US"/>
+          </a:p>
+        </p:txBody>
+      </p:sp>
+      <p:sp>
+        <p:nvSpPr>
+          <p:cNvPr id="15" name="Isosceles Triangle 14"/>
+          <p:cNvSpPr/>
           <p:nvPr/>
-        </p:nvCxnSpPr>
+        </p:nvSpPr>
         <p:spPr>
-          <a:xfrm flipH="1">
-            <a:off x="5257800" y="5284232"/>
-            <a:ext cx="1685603" cy="807135"/>
+          <a:xfrm rot="5400000">
+            <a:off x="4205640" y="4114800"/>
+            <a:ext cx="2362200" cy="381000"/>
           </a:xfrm>
-          <a:prstGeom prst="straightConnector1">
-            <a:avLst/>
+          <a:prstGeom prst="triangle">
+            <a:avLst>
+              <a:gd name="adj" fmla="val 0"/>
+            </a:avLst>
           </a:prstGeom>
-          <a:ln>
-            <a:tailEnd type="arrow"/>
-          </a:ln>
         </p:spPr>
         <p:style>
           <a:lnRef idx="1">
             <a:schemeClr val="dk1"/>
           </a:lnRef>
-          <a:fillRef idx="0">
+          <a:fillRef idx="2">
             <a:schemeClr val="dk1"/>
           </a:fillRef>
-          <a:effectRef idx="0">
+          <a:effectRef idx="1">
             <a:schemeClr val="dk1"/>
           </a:effectRef>
           <a:fontRef idx="minor">
-            <a:schemeClr val="tx1"/>
+            <a:schemeClr val="dk1"/>
           </a:fontRef>
         </p:style>
-      </p:cxnSp>
-      <mc:AlternateContent xmlns:mc="http://schemas.openxmlformats.org/markup-compatibility/2006" xmlns:a14="http://schemas.microsoft.com/office/drawing/2010/main">
-        <mc:Choice Requires="a14">
-          <p:sp>
-            <p:nvSpPr>
-              <p:cNvPr id="29" name="Rectangle 28"/>
-              <p:cNvSpPr/>
-              <p:nvPr/>
-            </p:nvSpPr>
-            <p:spPr>
-              <a:xfrm>
-                <a:off x="2918419" y="5181600"/>
-                <a:ext cx="1013419" cy="369332"/>
-              </a:xfrm>
-              <a:prstGeom prst="rect">
-                <a:avLst/>
-              </a:prstGeom>
-            </p:spPr>
-            <p:txBody>
-              <a:bodyPr wrap="none">
-                <a:spAutoFit/>
-              </a:bodyPr>
-              <a:lstStyle/>
-              <a:p>
-                <a:pPr/>
-                <a14:m>
-                  <m:oMathPara xmlns:m="http://schemas.openxmlformats.org/officeDocument/2006/math">
-                    <m:oMathParaPr>
-                      <m:jc m:val="centerGroup"/>
-                    </m:oMathParaPr>
-                    <m:oMath xmlns:m="http://schemas.openxmlformats.org/officeDocument/2006/math">
-                      <m:r>
-                        <m:rPr>
-                          <m:sty m:val="p"/>
-                        </m:rPr>
-                        <a:rPr lang="el-GR" i="1" smtClean="0">
-                          <a:solidFill>
-                            <a:schemeClr val="tx1"/>
-                          </a:solidFill>
-                          <a:latin typeface="Cambria Math"/>
-                          <a:ea typeface="Cambria Math"/>
-                        </a:rPr>
-                        <m:t>θ</m:t>
-                      </m:r>
-                      <m:r>
-                        <a:rPr lang="en-US" b="0" i="1" smtClean="0">
-                          <a:solidFill>
-                            <a:schemeClr val="tx1"/>
-                          </a:solidFill>
-                          <a:latin typeface="Cambria Math"/>
-                          <a:ea typeface="Cambria Math"/>
-                        </a:rPr>
-                        <m:t>=10°</m:t>
-                      </m:r>
-                    </m:oMath>
-                  </m:oMathPara>
-                </a14:m>
-                <a:endParaRPr lang="en-US" sz="1100" dirty="0"/>
-              </a:p>
-            </p:txBody>
-          </p:sp>
-        </mc:Choice>
-        <mc:Fallback xmlns="">
-          <p:sp>
-            <p:nvSpPr>
-              <p:cNvPr id="29" name="Rectangle 28"/>
-              <p:cNvSpPr>
-                <a:spLocks noRot="1" noChangeAspect="1" noMove="1" noResize="1" noEditPoints="1" noAdjustHandles="1" noChangeArrowheads="1" noChangeShapeType="1" noTextEdit="1"/>
-              </p:cNvSpPr>
-              <p:nvPr/>
-            </p:nvSpPr>
-            <p:spPr>
-              <a:xfrm>
-                <a:off x="2918419" y="5181600"/>
-                <a:ext cx="1013419" cy="369332"/>
-              </a:xfrm>
-              <a:prstGeom prst="rect">
-                <a:avLst/>
-              </a:prstGeom>
-              <a:blipFill rotWithShape="1">
-                <a:blip r:embed="rId6"/>
-                <a:stretch>
-                  <a:fillRect/>
-                </a:stretch>
-              </a:blipFill>
-            </p:spPr>
-            <p:txBody>
-              <a:bodyPr/>
-              <a:lstStyle/>
-              <a:p>
-                <a:r>
-                  <a:rPr lang="en-US">
-                    <a:noFill/>
-                  </a:rPr>
-                  <a:t> </a:t>
-                </a:r>
-              </a:p>
-            </p:txBody>
-          </p:sp>
-        </mc:Fallback>
-      </mc:AlternateContent>
+        <p:txBody>
+          <a:bodyPr rtlCol="0" anchor="ctr"/>
+          <a:lstStyle/>
+          <a:p>
+            <a:pPr algn="ctr"/>
+            <a:endParaRPr lang="en-US"/>
+          </a:p>
+        </p:txBody>
+      </p:sp>
+      <p:sp>
+        <p:nvSpPr>
+          <p:cNvPr id="9" name="TextBox 8"/>
+          <p:cNvSpPr txBox="1"/>
+          <p:nvPr/>
+        </p:nvSpPr>
+        <p:spPr>
+          <a:xfrm>
+            <a:off x="5638801" y="2304871"/>
+            <a:ext cx="3362002" cy="1754326"/>
+          </a:xfrm>
+          <a:prstGeom prst="rect">
+            <a:avLst/>
+          </a:prstGeom>
+          <a:noFill/>
+        </p:spPr>
+        <p:txBody>
+          <a:bodyPr wrap="square" rtlCol="0">
+            <a:spAutoFit/>
+          </a:bodyPr>
+          <a:lstStyle/>
+          <a:p>
+            <a:pPr marL="285750" indent="-285750">
+              <a:buFont typeface="Arial" panose="020B0604020202020204" pitchFamily="34" charset="0"/>
+              <a:buChar char="•"/>
+            </a:pPr>
+            <a:r>
+              <a:rPr lang="en-US" dirty="0"/>
+              <a:t>Mass of safe = 150 kg</a:t>
+            </a:r>
+          </a:p>
+          <a:p>
+            <a:pPr marL="285750" indent="-285750">
+              <a:buFont typeface="Arial" panose="020B0604020202020204" pitchFamily="34" charset="0"/>
+              <a:buChar char="•"/>
+            </a:pPr>
+            <a:r>
+              <a:rPr lang="en-US" dirty="0"/>
+              <a:t>Angle of wedge = 5</a:t>
+            </a:r>
+            <a:r>
+              <a:rPr lang="en-US" baseline="30000" dirty="0"/>
+              <a:t>o</a:t>
+            </a:r>
+          </a:p>
+          <a:p>
+            <a:pPr marL="285750" indent="-285750">
+              <a:buFont typeface="Arial" panose="020B0604020202020204" pitchFamily="34" charset="0"/>
+              <a:buChar char="•"/>
+            </a:pPr>
+            <a:r>
+              <a:rPr lang="en-US" dirty="0"/>
+              <a:t>Coefficient static and  of kinetic friction = 0.16 for wedge and safe and 0.35 for everything else</a:t>
+            </a:r>
+          </a:p>
+        </p:txBody>
+      </p:sp>
     </p:spTree>
     <p:extLst>
       <p:ext uri="{BB962C8B-B14F-4D97-AF65-F5344CB8AC3E}">
-        <p14:creationId xmlns:p14="http://schemas.microsoft.com/office/powerpoint/2010/main" val="1960854857"/>
+        <p14:creationId xmlns:p14="http://schemas.microsoft.com/office/powerpoint/2010/main" val="3633825459"/>
       </p:ext>
     </p:extLst>
   </p:cSld>
@@ -14810,7 +14254,13 @@
       </p:grpSpPr>
       <p:sp>
         <p:nvSpPr>
-          <p:cNvPr id="2" name="Title 1"/>
+          <p:cNvPr id="2" name="Title 1">
+            <a:extLst>
+              <a:ext uri="{FF2B5EF4-FFF2-40B4-BE49-F238E27FC236}">
+                <a16:creationId xmlns:a16="http://schemas.microsoft.com/office/drawing/2014/main" id="{4146E9E2-4483-3512-5E20-416D57892711}"/>
+              </a:ext>
+            </a:extLst>
+          </p:cNvPr>
           <p:cNvSpPr>
             <a:spLocks noGrp="1"/>
           </p:cNvSpPr>
@@ -14832,7 +14282,13 @@
       </p:sp>
       <p:sp>
         <p:nvSpPr>
-          <p:cNvPr id="3" name="Content Placeholder 2"/>
+          <p:cNvPr id="3" name="Content Placeholder 2">
+            <a:extLst>
+              <a:ext uri="{FF2B5EF4-FFF2-40B4-BE49-F238E27FC236}">
+                <a16:creationId xmlns:a16="http://schemas.microsoft.com/office/drawing/2014/main" id="{C9AFFB3C-7821-9688-3E3D-06431FDB9493}"/>
+              </a:ext>
+            </a:extLst>
+          </p:cNvPr>
           <p:cNvSpPr>
             <a:spLocks noGrp="1"/>
           </p:cNvSpPr>
@@ -14843,210 +14299,478 @@
         <p:spPr>
           <a:xfrm>
             <a:off x="457200" y="1600200"/>
-            <a:ext cx="3886200" cy="4850051"/>
+            <a:ext cx="4114800" cy="4525963"/>
           </a:xfrm>
         </p:spPr>
         <p:txBody>
           <a:bodyPr>
-            <a:normAutofit fontScale="70000" lnSpcReduction="20000"/>
+            <a:normAutofit fontScale="77500" lnSpcReduction="20000"/>
           </a:bodyPr>
           <a:lstStyle/>
           <a:p>
             <a:r>
               <a:rPr lang="en-US" dirty="0"/>
-              <a:t>A heavy safe is being pushed away from a wall with a wedge as shown to the right. Assume the wedge has an angle of 5 degrees, the coefficient of friction (static and kinetic) between the wedge and the safe is .16, and the coefficients of friction (static and kinetic) between the wedge and the wall and the safe and the floor are both .35. What is the pushing force required to move the safe out from the wall?</a:t>
+              <a:t>A geologist drills a hole through a rock and is trying to split the rock using a rock chisel as shown below. Assume the tip of the chisel has a 20-degree angle and that the coefficient of friction between the chisel and rock is 0.3. If the geologist exerts a 30kN force by striking the chisel with a hammer, what are the expected normal forces on the rock?</a:t>
             </a:r>
+          </a:p>
+        </p:txBody>
+      </p:sp>
+      <p:sp>
+        <p:nvSpPr>
+          <p:cNvPr id="4" name="Slide Number Placeholder 3">
+            <a:extLst>
+              <a:ext uri="{FF2B5EF4-FFF2-40B4-BE49-F238E27FC236}">
+                <a16:creationId xmlns:a16="http://schemas.microsoft.com/office/drawing/2014/main" id="{B203AD27-B768-91B3-62DC-BE74B9E528B8}"/>
+              </a:ext>
+            </a:extLst>
+          </p:cNvPr>
+          <p:cNvSpPr>
+            <a:spLocks noGrp="1"/>
+          </p:cNvSpPr>
+          <p:nvPr>
+            <p:ph type="sldNum" sz="quarter" idx="12"/>
+          </p:nvPr>
+        </p:nvSpPr>
+        <p:spPr/>
+        <p:txBody>
+          <a:bodyPr/>
+          <a:lstStyle/>
+          <a:p>
+            <a:fld id="{929262FE-7F58-4A1E-8AF3-5A510A86DEBD}" type="slidenum">
+              <a:rPr lang="en-US" smtClean="0"/>
+              <a:t>9</a:t>
+            </a:fld>
+            <a:endParaRPr lang="en-US"/>
+          </a:p>
+        </p:txBody>
+      </p:sp>
+      <p:sp>
+        <p:nvSpPr>
+          <p:cNvPr id="5" name="Rectangle 4">
+            <a:extLst>
+              <a:ext uri="{FF2B5EF4-FFF2-40B4-BE49-F238E27FC236}">
+                <a16:creationId xmlns:a16="http://schemas.microsoft.com/office/drawing/2014/main" id="{558A6173-C00B-5CE6-02C9-D16E3EC4011B}"/>
+              </a:ext>
+            </a:extLst>
+          </p:cNvPr>
+          <p:cNvSpPr/>
+          <p:nvPr/>
+        </p:nvSpPr>
+        <p:spPr>
+          <a:xfrm>
+            <a:off x="5257800" y="3413442"/>
+            <a:ext cx="3276600" cy="2210117"/>
+          </a:xfrm>
+          <a:prstGeom prst="rect">
+            <a:avLst/>
+          </a:prstGeom>
+          <a:solidFill>
+            <a:schemeClr val="bg1">
+              <a:lumMod val="85000"/>
+            </a:schemeClr>
+          </a:solidFill>
+          <a:ln>
+            <a:solidFill>
+              <a:schemeClr val="bg1">
+                <a:lumMod val="50000"/>
+              </a:schemeClr>
+            </a:solidFill>
+          </a:ln>
+        </p:spPr>
+        <p:style>
+          <a:lnRef idx="2">
+            <a:schemeClr val="accent1">
+              <a:shade val="15000"/>
+            </a:schemeClr>
+          </a:lnRef>
+          <a:fillRef idx="1">
+            <a:schemeClr val="accent1"/>
+          </a:fillRef>
+          <a:effectRef idx="0">
+            <a:schemeClr val="accent1"/>
+          </a:effectRef>
+          <a:fontRef idx="minor">
+            <a:schemeClr val="lt1"/>
+          </a:fontRef>
+        </p:style>
+        <p:txBody>
+          <a:bodyPr rtlCol="0" anchor="ctr"/>
+          <a:lstStyle/>
+          <a:p>
+            <a:pPr algn="ctr"/>
+            <a:endParaRPr lang="en-US"/>
+          </a:p>
+        </p:txBody>
+      </p:sp>
+      <p:grpSp>
+        <p:nvGrpSpPr>
+          <p:cNvPr id="10" name="Group 9">
+            <a:extLst>
+              <a:ext uri="{FF2B5EF4-FFF2-40B4-BE49-F238E27FC236}">
+                <a16:creationId xmlns:a16="http://schemas.microsoft.com/office/drawing/2014/main" id="{40526A5E-23BE-9D51-D62A-0A98E64F4DE5}"/>
+              </a:ext>
+            </a:extLst>
+          </p:cNvPr>
+          <p:cNvGrpSpPr/>
+          <p:nvPr/>
+        </p:nvGrpSpPr>
+        <p:grpSpPr>
+          <a:xfrm>
+            <a:off x="6623685" y="2170749"/>
+            <a:ext cx="549275" cy="1614010"/>
+            <a:chOff x="6726555" y="1141095"/>
+            <a:chExt cx="565150" cy="2054225"/>
+          </a:xfrm>
+        </p:grpSpPr>
+        <p:sp>
+          <p:nvSpPr>
+            <p:cNvPr id="7" name="Isosceles Triangle 6">
+              <a:extLst>
+                <a:ext uri="{FF2B5EF4-FFF2-40B4-BE49-F238E27FC236}">
+                  <a16:creationId xmlns:a16="http://schemas.microsoft.com/office/drawing/2014/main" id="{188F05CE-EC2D-B584-F761-B7F13400EA9B}"/>
+                </a:ext>
+              </a:extLst>
+            </p:cNvPr>
+            <p:cNvSpPr/>
+            <p:nvPr/>
+          </p:nvSpPr>
+          <p:spPr>
+            <a:xfrm rot="10800000">
+              <a:off x="6826250" y="2384108"/>
+              <a:ext cx="365760" cy="811212"/>
+            </a:xfrm>
+            <a:prstGeom prst="triangle">
+              <a:avLst/>
+            </a:prstGeom>
+            <a:solidFill>
+              <a:schemeClr val="bg1">
+                <a:lumMod val="50000"/>
+              </a:schemeClr>
+            </a:solidFill>
+            <a:ln>
+              <a:solidFill>
+                <a:schemeClr val="tx1">
+                  <a:lumMod val="75000"/>
+                  <a:lumOff val="25000"/>
+                </a:schemeClr>
+              </a:solidFill>
+            </a:ln>
+          </p:spPr>
+          <p:style>
+            <a:lnRef idx="2">
+              <a:schemeClr val="accent1">
+                <a:shade val="15000"/>
+              </a:schemeClr>
+            </a:lnRef>
+            <a:fillRef idx="1">
+              <a:schemeClr val="accent1"/>
+            </a:fillRef>
+            <a:effectRef idx="0">
+              <a:schemeClr val="accent1"/>
+            </a:effectRef>
+            <a:fontRef idx="minor">
+              <a:schemeClr val="lt1"/>
+            </a:fontRef>
+          </p:style>
+          <p:txBody>
+            <a:bodyPr rtlCol="0" anchor="ctr"/>
+            <a:lstStyle/>
+            <a:p>
+              <a:pPr algn="ctr"/>
+              <a:endParaRPr lang="en-US"/>
+            </a:p>
+          </p:txBody>
+        </p:sp>
+        <p:sp>
+          <p:nvSpPr>
+            <p:cNvPr id="8" name="Rectangle 7">
+              <a:extLst>
+                <a:ext uri="{FF2B5EF4-FFF2-40B4-BE49-F238E27FC236}">
+                  <a16:creationId xmlns:a16="http://schemas.microsoft.com/office/drawing/2014/main" id="{19D46790-7F97-0DE9-0FA7-3007F141CD5B}"/>
+                </a:ext>
+              </a:extLst>
+            </p:cNvPr>
+            <p:cNvSpPr/>
+            <p:nvPr/>
+          </p:nvSpPr>
+          <p:spPr>
+            <a:xfrm>
+              <a:off x="6826250" y="1243013"/>
+              <a:ext cx="365760" cy="1143000"/>
+            </a:xfrm>
+            <a:prstGeom prst="rect">
+              <a:avLst/>
+            </a:prstGeom>
+            <a:solidFill>
+              <a:schemeClr val="bg1">
+                <a:lumMod val="50000"/>
+              </a:schemeClr>
+            </a:solidFill>
+            <a:ln>
+              <a:solidFill>
+                <a:schemeClr val="tx1">
+                  <a:lumMod val="75000"/>
+                  <a:lumOff val="25000"/>
+                </a:schemeClr>
+              </a:solidFill>
+            </a:ln>
+          </p:spPr>
+          <p:style>
+            <a:lnRef idx="2">
+              <a:schemeClr val="accent1">
+                <a:shade val="15000"/>
+              </a:schemeClr>
+            </a:lnRef>
+            <a:fillRef idx="1">
+              <a:schemeClr val="accent1"/>
+            </a:fillRef>
+            <a:effectRef idx="0">
+              <a:schemeClr val="accent1"/>
+            </a:effectRef>
+            <a:fontRef idx="minor">
+              <a:schemeClr val="lt1"/>
+            </a:fontRef>
+          </p:style>
+          <p:txBody>
+            <a:bodyPr rtlCol="0" anchor="ctr"/>
+            <a:lstStyle/>
+            <a:p>
+              <a:pPr algn="ctr"/>
+              <a:endParaRPr lang="en-US"/>
+            </a:p>
+          </p:txBody>
+        </p:sp>
+        <p:sp>
+          <p:nvSpPr>
+            <p:cNvPr id="9" name="Rectangle 8">
+              <a:extLst>
+                <a:ext uri="{FF2B5EF4-FFF2-40B4-BE49-F238E27FC236}">
+                  <a16:creationId xmlns:a16="http://schemas.microsoft.com/office/drawing/2014/main" id="{80A49203-521F-147C-3F0F-7177891B63CA}"/>
+                </a:ext>
+              </a:extLst>
+            </p:cNvPr>
+            <p:cNvSpPr/>
+            <p:nvPr/>
+          </p:nvSpPr>
+          <p:spPr>
+            <a:xfrm>
+              <a:off x="6726555" y="1141095"/>
+              <a:ext cx="565150" cy="154305"/>
+            </a:xfrm>
+            <a:prstGeom prst="rect">
+              <a:avLst/>
+            </a:prstGeom>
+            <a:solidFill>
+              <a:schemeClr val="bg1">
+                <a:lumMod val="50000"/>
+              </a:schemeClr>
+            </a:solidFill>
+            <a:ln>
+              <a:solidFill>
+                <a:schemeClr val="tx1">
+                  <a:lumMod val="75000"/>
+                  <a:lumOff val="25000"/>
+                </a:schemeClr>
+              </a:solidFill>
+            </a:ln>
+          </p:spPr>
+          <p:style>
+            <a:lnRef idx="2">
+              <a:schemeClr val="accent1">
+                <a:shade val="15000"/>
+              </a:schemeClr>
+            </a:lnRef>
+            <a:fillRef idx="1">
+              <a:schemeClr val="accent1"/>
+            </a:fillRef>
+            <a:effectRef idx="0">
+              <a:schemeClr val="accent1"/>
+            </a:effectRef>
+            <a:fontRef idx="minor">
+              <a:schemeClr val="lt1"/>
+            </a:fontRef>
+          </p:style>
+          <p:txBody>
+            <a:bodyPr rtlCol="0" anchor="ctr"/>
+            <a:lstStyle/>
+            <a:p>
+              <a:pPr algn="ctr"/>
+              <a:endParaRPr lang="en-US"/>
+            </a:p>
+          </p:txBody>
+        </p:sp>
+      </p:grpSp>
+      <p:sp>
+        <p:nvSpPr>
+          <p:cNvPr id="6" name="Rectangle 5">
+            <a:extLst>
+              <a:ext uri="{FF2B5EF4-FFF2-40B4-BE49-F238E27FC236}">
+                <a16:creationId xmlns:a16="http://schemas.microsoft.com/office/drawing/2014/main" id="{ABD8BCE1-699C-49AC-A4C8-DCC0258915D0}"/>
+              </a:ext>
+            </a:extLst>
+          </p:cNvPr>
+          <p:cNvSpPr/>
+          <p:nvPr/>
+        </p:nvSpPr>
+        <p:spPr>
+          <a:xfrm>
+            <a:off x="6774497" y="3413441"/>
+            <a:ext cx="247650" cy="2210118"/>
+          </a:xfrm>
+          <a:prstGeom prst="rect">
+            <a:avLst/>
+          </a:prstGeom>
+          <a:solidFill>
+            <a:schemeClr val="bg1">
+              <a:lumMod val="95000"/>
+              <a:alpha val="76000"/>
+            </a:schemeClr>
+          </a:solidFill>
+          <a:ln>
+            <a:solidFill>
+              <a:schemeClr val="bg1">
+                <a:lumMod val="50000"/>
+              </a:schemeClr>
+            </a:solidFill>
+            <a:prstDash val="dash"/>
+          </a:ln>
+        </p:spPr>
+        <p:style>
+          <a:lnRef idx="2">
+            <a:schemeClr val="accent1">
+              <a:shade val="15000"/>
+            </a:schemeClr>
+          </a:lnRef>
+          <a:fillRef idx="1">
+            <a:schemeClr val="accent1"/>
+          </a:fillRef>
+          <a:effectRef idx="0">
+            <a:schemeClr val="accent1"/>
+          </a:effectRef>
+          <a:fontRef idx="minor">
+            <a:schemeClr val="lt1"/>
+          </a:fontRef>
+        </p:style>
+        <p:txBody>
+          <a:bodyPr rtlCol="0" anchor="ctr"/>
+          <a:lstStyle/>
+          <a:p>
+            <a:pPr algn="ctr"/>
+            <a:endParaRPr lang="en-US"/>
           </a:p>
         </p:txBody>
       </p:sp>
       <p:cxnSp>
         <p:nvCxnSpPr>
-          <p:cNvPr id="5" name="Straight Arrow Connector 4"/>
-          <p:cNvCxnSpPr/>
+          <p:cNvPr id="12" name="Straight Arrow Connector 11">
+            <a:extLst>
+              <a:ext uri="{FF2B5EF4-FFF2-40B4-BE49-F238E27FC236}">
+                <a16:creationId xmlns:a16="http://schemas.microsoft.com/office/drawing/2014/main" id="{3AAC82BB-E4AF-95E2-A07E-DAEECFB5C803}"/>
+              </a:ext>
+            </a:extLst>
+          </p:cNvPr>
+          <p:cNvCxnSpPr>
+            <a:cxnSpLocks/>
+          </p:cNvCxnSpPr>
           <p:nvPr/>
         </p:nvCxnSpPr>
         <p:spPr>
           <a:xfrm>
-            <a:off x="5386740" y="2220759"/>
-            <a:ext cx="0" cy="903441"/>
+            <a:off x="6898322" y="1393509"/>
+            <a:ext cx="0" cy="762000"/>
           </a:xfrm>
           <a:prstGeom prst="straightConnector1">
             <a:avLst/>
           </a:prstGeom>
-          <a:ln>
+          <a:ln w="38100" cap="flat" cmpd="sng" algn="ctr">
             <a:solidFill>
               <a:srgbClr val="FF0000"/>
             </a:solidFill>
             <a:prstDash val="solid"/>
-            <a:tailEnd type="arrow"/>
+            <a:round/>
+            <a:headEnd type="none" w="med" len="med"/>
+            <a:tailEnd type="arrow" w="med" len="med"/>
           </a:ln>
         </p:spPr>
         <p:style>
-          <a:lnRef idx="2">
-            <a:schemeClr val="accent2"/>
+          <a:lnRef idx="0">
+            <a:scrgbClr r="0" g="0" b="0"/>
           </a:lnRef>
           <a:fillRef idx="0">
-            <a:schemeClr val="accent2"/>
+            <a:scrgbClr r="0" g="0" b="0"/>
           </a:fillRef>
-          <a:effectRef idx="1">
-            <a:schemeClr val="accent2"/>
+          <a:effectRef idx="0">
+            <a:scrgbClr r="0" g="0" b="0"/>
           </a:effectRef>
           <a:fontRef idx="minor">
             <a:schemeClr val="tx1"/>
           </a:fontRef>
         </p:style>
       </p:cxnSp>
-      <mc:AlternateContent xmlns:mc="http://schemas.openxmlformats.org/markup-compatibility/2006" xmlns:a14="http://schemas.microsoft.com/office/drawing/2010/main">
-        <mc:Choice Requires="a14">
-          <p:sp>
-            <p:nvSpPr>
-              <p:cNvPr id="11" name="Rectangle 10"/>
-              <p:cNvSpPr/>
-              <p:nvPr/>
-            </p:nvSpPr>
-            <p:spPr>
-              <a:xfrm>
-                <a:off x="4996537" y="1826740"/>
-                <a:ext cx="780406" cy="394019"/>
-              </a:xfrm>
-              <a:prstGeom prst="rect">
-                <a:avLst/>
-              </a:prstGeom>
-            </p:spPr>
-            <p:txBody>
-              <a:bodyPr wrap="none">
-                <a:spAutoFit/>
-              </a:bodyPr>
-              <a:lstStyle/>
-              <a:p>
-                <a:pPr/>
-                <a14:m>
-                  <m:oMathPara xmlns:m="http://schemas.openxmlformats.org/officeDocument/2006/math">
-                    <m:oMathParaPr>
-                      <m:jc m:val="centerGroup"/>
-                    </m:oMathParaPr>
-                    <m:oMath xmlns:m="http://schemas.openxmlformats.org/officeDocument/2006/math">
-                      <m:sSub>
-                        <m:sSubPr>
-                          <m:ctrlPr>
-                            <a:rPr lang="en-US" i="1" smtClean="0">
-                              <a:solidFill>
-                                <a:srgbClr val="FF0000"/>
-                              </a:solidFill>
-                              <a:latin typeface="Cambria Math" panose="02040503050406030204" pitchFamily="18" charset="0"/>
-                            </a:rPr>
-                          </m:ctrlPr>
-                        </m:sSubPr>
-                        <m:e>
-                          <m:r>
-                            <m:rPr>
-                              <m:sty m:val="p"/>
-                            </m:rPr>
-                            <a:rPr lang="en-US">
-                              <a:solidFill>
-                                <a:srgbClr val="FF0000"/>
-                              </a:solidFill>
-                              <a:latin typeface="Cambria Math"/>
-                            </a:rPr>
-                            <m:t>F</m:t>
-                          </m:r>
-                        </m:e>
-                        <m:sub>
-                          <m:r>
-                            <m:rPr>
-                              <m:sty m:val="p"/>
-                            </m:rPr>
-                            <a:rPr lang="en-US" b="0" i="0" smtClean="0">
-                              <a:solidFill>
-                                <a:srgbClr val="FF0000"/>
-                              </a:solidFill>
-                              <a:latin typeface="Cambria Math"/>
-                            </a:rPr>
-                            <m:t>push</m:t>
-                          </m:r>
-                        </m:sub>
-                      </m:sSub>
-                    </m:oMath>
-                  </m:oMathPara>
-                </a14:m>
-                <a:endParaRPr lang="en-US" dirty="0"/>
-              </a:p>
-            </p:txBody>
-          </p:sp>
-        </mc:Choice>
-        <mc:Fallback xmlns="">
-          <p:sp>
-            <p:nvSpPr>
-              <p:cNvPr id="11" name="Rectangle 10"/>
-              <p:cNvSpPr>
-                <a:spLocks noRot="1" noChangeAspect="1" noMove="1" noResize="1" noEditPoints="1" noAdjustHandles="1" noChangeArrowheads="1" noChangeShapeType="1" noTextEdit="1"/>
-              </p:cNvSpPr>
-              <p:nvPr/>
-            </p:nvSpPr>
-            <p:spPr>
-              <a:xfrm>
-                <a:off x="4996537" y="1826740"/>
-                <a:ext cx="780406" cy="394019"/>
-              </a:xfrm>
-              <a:prstGeom prst="rect">
-                <a:avLst/>
-              </a:prstGeom>
-              <a:blipFill rotWithShape="1">
-                <a:blip r:embed="rId2"/>
-                <a:stretch>
-                  <a:fillRect b="-10938"/>
-                </a:stretch>
-              </a:blipFill>
-            </p:spPr>
-            <p:txBody>
-              <a:bodyPr/>
-              <a:lstStyle/>
-              <a:p>
-                <a:r>
-                  <a:rPr lang="en-US">
-                    <a:noFill/>
-                  </a:rPr>
-                  <a:t> </a:t>
-                </a:r>
-              </a:p>
-            </p:txBody>
-          </p:sp>
-        </mc:Fallback>
-      </mc:AlternateContent>
       <p:sp>
         <p:nvSpPr>
-          <p:cNvPr id="14" name="L-Shape 13"/>
+          <p:cNvPr id="14" name="TextBox 13">
+            <a:extLst>
+              <a:ext uri="{FF2B5EF4-FFF2-40B4-BE49-F238E27FC236}">
+                <a16:creationId xmlns:a16="http://schemas.microsoft.com/office/drawing/2014/main" id="{83E6BA4C-F1B9-7F19-C55B-9F4EC6ABB064}"/>
+              </a:ext>
+            </a:extLst>
+          </p:cNvPr>
+          <p:cNvSpPr txBox="1"/>
+          <p:nvPr/>
+        </p:nvSpPr>
+        <p:spPr>
+          <a:xfrm>
+            <a:off x="7076066" y="1497530"/>
+            <a:ext cx="734496" cy="369332"/>
+          </a:xfrm>
+          <a:prstGeom prst="rect">
+            <a:avLst/>
+          </a:prstGeom>
+          <a:noFill/>
+        </p:spPr>
+        <p:txBody>
+          <a:bodyPr wrap="none" rtlCol="0">
+            <a:spAutoFit/>
+          </a:bodyPr>
+          <a:lstStyle/>
+          <a:p>
+            <a:r>
+              <a:rPr lang="en-US" b="1" dirty="0">
+                <a:solidFill>
+                  <a:srgbClr val="FF0000"/>
+                </a:solidFill>
+              </a:rPr>
+              <a:t>30 kN</a:t>
+            </a:r>
+          </a:p>
+        </p:txBody>
+      </p:sp>
+      <p:sp>
+        <p:nvSpPr>
+          <p:cNvPr id="15" name="Rectangle 14">
+            <a:extLst>
+              <a:ext uri="{FF2B5EF4-FFF2-40B4-BE49-F238E27FC236}">
+                <a16:creationId xmlns:a16="http://schemas.microsoft.com/office/drawing/2014/main" id="{B9AE079F-88DF-CA15-7949-7DFA749E4ADD}"/>
+              </a:ext>
+            </a:extLst>
+          </p:cNvPr>
           <p:cNvSpPr/>
           <p:nvPr/>
         </p:nvSpPr>
         <p:spPr>
           <a:xfrm>
-            <a:off x="4876800" y="3334396"/>
-            <a:ext cx="3733800" cy="3218804"/>
+            <a:off x="4876800" y="5623559"/>
+            <a:ext cx="4038600" cy="637371"/>
           </a:xfrm>
-          <a:prstGeom prst="corner">
-            <a:avLst>
-              <a:gd name="adj1" fmla="val 8402"/>
-              <a:gd name="adj2" fmla="val 9755"/>
-            </a:avLst>
+          <a:prstGeom prst="rect">
+            <a:avLst/>
           </a:prstGeom>
-          <a:solidFill>
-            <a:schemeClr val="bg2">
-              <a:lumMod val="50000"/>
-            </a:schemeClr>
-          </a:solidFill>
-          <a:ln>
-            <a:solidFill>
-              <a:schemeClr val="bg2">
-                <a:lumMod val="25000"/>
-              </a:schemeClr>
-            </a:solidFill>
-          </a:ln>
         </p:spPr>
         <p:style>
           <a:lnRef idx="2">
             <a:schemeClr val="accent3">
-              <a:shade val="50000"/>
+              <a:shade val="15000"/>
             </a:schemeClr>
           </a:lnRef>
           <a:fillRef idx="1">
@@ -15068,145 +14792,10 @@
           </a:p>
         </p:txBody>
       </p:sp>
-      <p:sp>
-        <p:nvSpPr>
-          <p:cNvPr id="4" name="Rectangle 3"/>
-          <p:cNvSpPr/>
-          <p:nvPr/>
-        </p:nvSpPr>
-        <p:spPr>
-          <a:xfrm>
-            <a:off x="5307520" y="4821278"/>
-            <a:ext cx="1550480" cy="1444307"/>
-          </a:xfrm>
-          <a:prstGeom prst="rect">
-            <a:avLst/>
-          </a:prstGeom>
-        </p:spPr>
-        <p:style>
-          <a:lnRef idx="1">
-            <a:schemeClr val="dk1"/>
-          </a:lnRef>
-          <a:fillRef idx="2">
-            <a:schemeClr val="dk1"/>
-          </a:fillRef>
-          <a:effectRef idx="1">
-            <a:schemeClr val="dk1"/>
-          </a:effectRef>
-          <a:fontRef idx="minor">
-            <a:schemeClr val="dk1"/>
-          </a:fontRef>
-        </p:style>
-        <p:txBody>
-          <a:bodyPr rtlCol="0" anchor="ctr"/>
-          <a:lstStyle/>
-          <a:p>
-            <a:pPr algn="ctr"/>
-            <a:endParaRPr lang="en-US"/>
-          </a:p>
-        </p:txBody>
-      </p:sp>
-      <p:sp>
-        <p:nvSpPr>
-          <p:cNvPr id="15" name="Isosceles Triangle 14"/>
-          <p:cNvSpPr/>
-          <p:nvPr/>
-        </p:nvSpPr>
-        <p:spPr>
-          <a:xfrm rot="5400000">
-            <a:off x="4205640" y="4114800"/>
-            <a:ext cx="2362200" cy="381000"/>
-          </a:xfrm>
-          <a:prstGeom prst="triangle">
-            <a:avLst>
-              <a:gd name="adj" fmla="val 0"/>
-            </a:avLst>
-          </a:prstGeom>
-        </p:spPr>
-        <p:style>
-          <a:lnRef idx="1">
-            <a:schemeClr val="dk1"/>
-          </a:lnRef>
-          <a:fillRef idx="2">
-            <a:schemeClr val="dk1"/>
-          </a:fillRef>
-          <a:effectRef idx="1">
-            <a:schemeClr val="dk1"/>
-          </a:effectRef>
-          <a:fontRef idx="minor">
-            <a:schemeClr val="dk1"/>
-          </a:fontRef>
-        </p:style>
-        <p:txBody>
-          <a:bodyPr rtlCol="0" anchor="ctr"/>
-          <a:lstStyle/>
-          <a:p>
-            <a:pPr algn="ctr"/>
-            <a:endParaRPr lang="en-US"/>
-          </a:p>
-        </p:txBody>
-      </p:sp>
-      <p:sp>
-        <p:nvSpPr>
-          <p:cNvPr id="9" name="TextBox 8"/>
-          <p:cNvSpPr txBox="1"/>
-          <p:nvPr/>
-        </p:nvSpPr>
-        <p:spPr>
-          <a:xfrm>
-            <a:off x="5638800" y="2304871"/>
-            <a:ext cx="3657599" cy="1477328"/>
-          </a:xfrm>
-          <a:prstGeom prst="rect">
-            <a:avLst/>
-          </a:prstGeom>
-          <a:noFill/>
-        </p:spPr>
-        <p:txBody>
-          <a:bodyPr wrap="square" rtlCol="0">
-            <a:spAutoFit/>
-          </a:bodyPr>
-          <a:lstStyle/>
-          <a:p>
-            <a:pPr marL="285750" indent="-285750">
-              <a:buFont typeface="Arial" panose="020B0604020202020204" pitchFamily="34" charset="0"/>
-              <a:buChar char="•"/>
-            </a:pPr>
-            <a:r>
-              <a:rPr lang="en-US" dirty="0"/>
-              <a:t>Mass of safe = 150 kg</a:t>
-            </a:r>
-          </a:p>
-          <a:p>
-            <a:pPr marL="285750" indent="-285750">
-              <a:buFont typeface="Arial" panose="020B0604020202020204" pitchFamily="34" charset="0"/>
-              <a:buChar char="•"/>
-            </a:pPr>
-            <a:r>
-              <a:rPr lang="en-US" dirty="0"/>
-              <a:t>Angle of wedge = 5</a:t>
-            </a:r>
-            <a:r>
-              <a:rPr lang="en-US" baseline="30000" dirty="0"/>
-              <a:t>o</a:t>
-            </a:r>
-          </a:p>
-          <a:p>
-            <a:pPr marL="285750" indent="-285750">
-              <a:buFont typeface="Arial" panose="020B0604020202020204" pitchFamily="34" charset="0"/>
-              <a:buChar char="•"/>
-            </a:pPr>
-            <a:r>
-              <a:rPr lang="en-US" dirty="0"/>
-              <a:t>Coefficient static and  of kinetic friction = .16 for wedge and safe and .35 for everything else</a:t>
-            </a:r>
-          </a:p>
-        </p:txBody>
-      </p:sp>
     </p:spTree>
     <p:extLst>
       <p:ext uri="{BB962C8B-B14F-4D97-AF65-F5344CB8AC3E}">
-        <p14:creationId xmlns:p14="http://schemas.microsoft.com/office/powerpoint/2010/main" val="3633825459"/>
+        <p14:creationId xmlns:p14="http://schemas.microsoft.com/office/powerpoint/2010/main" val="739956194"/>
       </p:ext>
     </p:extLst>
   </p:cSld>
@@ -15787,21 +15376,6 @@
 </file>
 
 <file path=customXml/item1.xml><?xml version="1.0" encoding="utf-8"?>
-<p:properties xmlns:p="http://schemas.microsoft.com/office/2006/metadata/properties" xmlns:xsi="http://www.w3.org/2001/XMLSchema-instance" xmlns:pc="http://schemas.microsoft.com/office/infopath/2007/PartnerControls">
-  <documentManagement/>
-</p:properties>
-</file>
-
-<file path=customXml/item2.xml><?xml version="1.0" encoding="utf-8"?>
-<?mso-contentType ?>
-<FormTemplates xmlns="http://schemas.microsoft.com/sharepoint/v3/contenttype/forms">
-  <Display>DocumentLibraryForm</Display>
-  <Edit>DocumentLibraryForm</Edit>
-  <New>DocumentLibraryForm</New>
-</FormTemplates>
-</file>
-
-<file path=customXml/item3.xml><?xml version="1.0" encoding="utf-8"?>
 <ct:contentTypeSchema xmlns:ct="http://schemas.microsoft.com/office/2006/metadata/contentType" xmlns:ma="http://schemas.microsoft.com/office/2006/metadata/properties/metaAttributes" ct:_="" ma:_="" ma:contentTypeName="Document" ma:contentTypeID="0x010100A06DF21F5BB2734A800ED30F3F452129" ma:contentTypeVersion="12" ma:contentTypeDescription="Create a new document." ma:contentTypeScope="" ma:versionID="544d96a5fbac5de9d5d902b535c73fb2">
   <xsd:schema xmlns:xsd="http://www.w3.org/2001/XMLSchema" xmlns:xs="http://www.w3.org/2001/XMLSchema" xmlns:p="http://schemas.microsoft.com/office/2006/metadata/properties" xmlns:ns3="90d05cb5-950f-4f68-bc2c-e17794455b92" xmlns:ns4="b4eab9fa-dbb0-4082-8491-8bd54207a265" targetNamespace="http://schemas.microsoft.com/office/2006/metadata/properties" ma:root="true" ma:fieldsID="7a710efc71c2169bf9c05e5a40dddf12" ns3:_="" ns4:_="">
     <xsd:import namespace="90d05cb5-950f-4f68-bc2c-e17794455b92"/>
@@ -16018,24 +15592,22 @@
 </ct:contentTypeSchema>
 </file>
 
-<file path=customXml/itemProps1.xml><?xml version="1.0" encoding="utf-8"?>
-<ds:datastoreItem xmlns:ds="http://schemas.openxmlformats.org/officeDocument/2006/customXml" ds:itemID="{52EB1464-66D1-425A-BBB5-7A9312BBE9C4}">
-  <ds:schemaRefs>
-    <ds:schemaRef ds:uri="http://schemas.microsoft.com/office/2006/metadata/properties"/>
-    <ds:schemaRef ds:uri="http://schemas.microsoft.com/office/infopath/2007/PartnerControls"/>
-  </ds:schemaRefs>
-</ds:datastoreItem>
+<file path=customXml/item2.xml><?xml version="1.0" encoding="utf-8"?>
+<?mso-contentType ?>
+<FormTemplates xmlns="http://schemas.microsoft.com/sharepoint/v3/contenttype/forms">
+  <Display>DocumentLibraryForm</Display>
+  <Edit>DocumentLibraryForm</Edit>
+  <New>DocumentLibraryForm</New>
+</FormTemplates>
 </file>
 
-<file path=customXml/itemProps2.xml><?xml version="1.0" encoding="utf-8"?>
-<ds:datastoreItem xmlns:ds="http://schemas.openxmlformats.org/officeDocument/2006/customXml" ds:itemID="{F5CF5F32-56DC-4068-8B04-457CF34A96F3}">
-  <ds:schemaRefs>
-    <ds:schemaRef ds:uri="http://schemas.microsoft.com/sharepoint/v3/contenttype/forms"/>
-  </ds:schemaRefs>
-</ds:datastoreItem>
+<file path=customXml/item3.xml><?xml version="1.0" encoding="utf-8"?>
+<p:properties xmlns:p="http://schemas.microsoft.com/office/2006/metadata/properties" xmlns:xsi="http://www.w3.org/2001/XMLSchema-instance" xmlns:pc="http://schemas.microsoft.com/office/infopath/2007/PartnerControls">
+  <documentManagement/>
+</p:properties>
 </file>
 
-<file path=customXml/itemProps3.xml><?xml version="1.0" encoding="utf-8"?>
+<file path=customXml/itemProps1.xml><?xml version="1.0" encoding="utf-8"?>
 <ds:datastoreItem xmlns:ds="http://schemas.openxmlformats.org/officeDocument/2006/customXml" ds:itemID="{A43B8A4B-79FE-4529-931C-D64224FA70E3}">
   <ds:schemaRefs>
     <ds:schemaRef ds:uri="http://schemas.microsoft.com/office/2006/metadata/contentType"/>
@@ -16052,4 +15624,21 @@
     <ds:schemaRef ds:uri="http://schemas.microsoft.com/internal/obd"/>
   </ds:schemaRefs>
 </ds:datastoreItem>
+</file>
+
+<file path=customXml/itemProps2.xml><?xml version="1.0" encoding="utf-8"?>
+<ds:datastoreItem xmlns:ds="http://schemas.openxmlformats.org/officeDocument/2006/customXml" ds:itemID="{F5CF5F32-56DC-4068-8B04-457CF34A96F3}">
+  <ds:schemaRefs>
+    <ds:schemaRef ds:uri="http://schemas.microsoft.com/sharepoint/v3/contenttype/forms"/>
+  </ds:schemaRefs>
+</ds:datastoreItem>
+</file>
+
+<file path=customXml/itemProps3.xml><?xml version="1.0" encoding="utf-8"?>
+<ds:datastoreItem xmlns:ds="http://schemas.openxmlformats.org/officeDocument/2006/customXml" ds:itemID="{52EB1464-66D1-425A-BBB5-7A9312BBE9C4}">
+  <ds:schemaRefs>
+    <ds:schemaRef ds:uri="http://schemas.microsoft.com/office/2006/metadata/properties"/>
+    <ds:schemaRef ds:uri="http://schemas.microsoft.com/office/infopath/2007/PartnerControls"/>
+  </ds:schemaRefs>
+</ds:datastoreItem>
 </file>